--- a/artifacts/editorial_accent_20261022/pptx/Figure12_Accent.pptx
+++ b/artifacts/editorial_accent_20261022/pptx/Figure12_Accent.pptx
@@ -52,6 +52,14 @@
 <file path=ppt/slides/slide1.xml><?xml version="1.0" encoding="utf-8"?>
 <p:sld xmlns:a="http://schemas.openxmlformats.org/drawingml/2006/main" xmlns:r="http://schemas.openxmlformats.org/officeDocument/2006/relationships" xmlns:p="http://schemas.openxmlformats.org/presentationml/2006/main">
   <p:cSld>
+    <p:bg>
+      <p:bgPr>
+        <a:solidFill>
+          <a:srgbClr val="FFFFFF"/>
+        </a:solidFill>
+        <a:effectLst/>
+      </p:bgPr>
+    </p:bg>
     <p:spTree>
       <p:nvGrpSpPr>
         <p:cNvPr id="1" name=""/>
@@ -288,7 +296,7 @@
                       <a:solidFill>
                         <a:srgbClr val="222222"/>
                       </a:solidFill>
-                      <a:latin typeface="Comic Sans MS"/>
+                      <a:latin typeface="Times New Roman"/>
                       <a:ea typeface="Times New Roman"/>
                       <a:cs typeface="Times New Roman"/>
                     </a:rPr>
@@ -541,7 +549,7 @@
                       <a:solidFill>
                         <a:srgbClr val="222222"/>
                       </a:solidFill>
-                      <a:latin typeface="Comic Sans MS"/>
+                      <a:latin typeface="Times New Roman"/>
                       <a:ea typeface="Times New Roman"/>
                       <a:cs typeface="Times New Roman"/>
                     </a:rPr>
@@ -584,7 +592,7 @@
                       <a:solidFill>
                         <a:srgbClr val="222222"/>
                       </a:solidFill>
-                      <a:latin typeface="Arial"/>
+                      <a:latin typeface="Times New Roman"/>
                       <a:ea typeface="Times New Roman"/>
                       <a:cs typeface="Times New Roman"/>
                     </a:rPr>
@@ -627,7 +635,7 @@
                       <a:solidFill>
                         <a:srgbClr val="222222"/>
                       </a:solidFill>
-                      <a:latin typeface="Arial"/>
+                      <a:latin typeface="Times New Roman"/>
                       <a:ea typeface="Times New Roman"/>
                       <a:cs typeface="Times New Roman"/>
                     </a:rPr>
@@ -670,7 +678,7 @@
                       <a:solidFill>
                         <a:srgbClr val="222222"/>
                       </a:solidFill>
-                      <a:latin typeface="Arial"/>
+                      <a:latin typeface="Times New Roman"/>
                       <a:ea typeface="Times New Roman"/>
                       <a:cs typeface="Times New Roman"/>
                     </a:rPr>
@@ -713,7 +721,7 @@
                       <a:solidFill>
                         <a:srgbClr val="222222"/>
                       </a:solidFill>
-                      <a:latin typeface="Arial"/>
+                      <a:latin typeface="Times New Roman"/>
                       <a:ea typeface="Times New Roman"/>
                       <a:cs typeface="Times New Roman"/>
                     </a:rPr>
@@ -756,7 +764,7 @@
                       <a:solidFill>
                         <a:srgbClr val="222222"/>
                       </a:solidFill>
-                      <a:latin typeface="Arial"/>
+                      <a:latin typeface="Times New Roman"/>
                       <a:ea typeface="Times New Roman"/>
                       <a:cs typeface="Times New Roman"/>
                     </a:rPr>
@@ -799,7 +807,7 @@
                       <a:solidFill>
                         <a:srgbClr val="222222"/>
                       </a:solidFill>
-                      <a:latin typeface="Arial"/>
+                      <a:latin typeface="Times New Roman"/>
                       <a:ea typeface="Times New Roman"/>
                       <a:cs typeface="Times New Roman"/>
                     </a:rPr>
@@ -928,7 +936,7 @@
                       <a:solidFill>
                         <a:srgbClr val="222222"/>
                       </a:solidFill>
-                      <a:latin typeface="Comic Sans MS"/>
+                      <a:latin typeface="Times New Roman"/>
                       <a:ea typeface="Times New Roman"/>
                       <a:cs typeface="Times New Roman"/>
                     </a:rPr>
@@ -971,7 +979,7 @@
                       <a:solidFill>
                         <a:srgbClr val="222222"/>
                       </a:solidFill>
-                      <a:latin typeface="Arial"/>
+                      <a:latin typeface="Times New Roman"/>
                       <a:ea typeface="Times New Roman"/>
                       <a:cs typeface="Times New Roman"/>
                     </a:rPr>
@@ -1014,7 +1022,7 @@
                       <a:solidFill>
                         <a:srgbClr val="222222"/>
                       </a:solidFill>
-                      <a:latin typeface="Arial"/>
+                      <a:latin typeface="Times New Roman"/>
                       <a:ea typeface="Times New Roman"/>
                       <a:cs typeface="Times New Roman"/>
                     </a:rPr>
@@ -1057,7 +1065,7 @@
                       <a:solidFill>
                         <a:srgbClr val="222222"/>
                       </a:solidFill>
-                      <a:latin typeface="Arial"/>
+                      <a:latin typeface="Times New Roman"/>
                       <a:ea typeface="Times New Roman"/>
                       <a:cs typeface="Times New Roman"/>
                     </a:rPr>
@@ -1100,7 +1108,7 @@
                       <a:solidFill>
                         <a:srgbClr val="222222"/>
                       </a:solidFill>
-                      <a:latin typeface="Arial"/>
+                      <a:latin typeface="Times New Roman"/>
                       <a:ea typeface="Times New Roman"/>
                       <a:cs typeface="Times New Roman"/>
                     </a:rPr>
@@ -1143,7 +1151,7 @@
                       <a:solidFill>
                         <a:srgbClr val="222222"/>
                       </a:solidFill>
-                      <a:latin typeface="Arial"/>
+                      <a:latin typeface="Times New Roman"/>
                       <a:ea typeface="Times New Roman"/>
                       <a:cs typeface="Times New Roman"/>
                     </a:rPr>
@@ -1186,7 +1194,7 @@
                       <a:solidFill>
                         <a:srgbClr val="222222"/>
                       </a:solidFill>
-                      <a:latin typeface="Arial"/>
+                      <a:latin typeface="Times New Roman"/>
                       <a:ea typeface="Times New Roman"/>
                       <a:cs typeface="Times New Roman"/>
                     </a:rPr>
@@ -2249,7 +2257,7 @@
                       <a:solidFill>
                         <a:srgbClr val="222222"/>
                       </a:solidFill>
-                      <a:latin typeface="Comic Sans MS"/>
+                      <a:latin typeface="Times New Roman"/>
                       <a:ea typeface="Times New Roman"/>
                       <a:cs typeface="Times New Roman"/>
                     </a:rPr>
@@ -2292,7 +2300,7 @@
                       <a:solidFill>
                         <a:srgbClr val="222222"/>
                       </a:solidFill>
-                      <a:latin typeface="Arial"/>
+                      <a:latin typeface="Times New Roman"/>
                       <a:ea typeface="Times New Roman"/>
                       <a:cs typeface="Times New Roman"/>
                     </a:rPr>
@@ -2335,7 +2343,7 @@
                       <a:solidFill>
                         <a:srgbClr val="222222"/>
                       </a:solidFill>
-                      <a:latin typeface="Arial"/>
+                      <a:latin typeface="Times New Roman"/>
                       <a:ea typeface="Times New Roman"/>
                       <a:cs typeface="Times New Roman"/>
                     </a:rPr>
@@ -2378,7 +2386,7 @@
                       <a:solidFill>
                         <a:srgbClr val="222222"/>
                       </a:solidFill>
-                      <a:latin typeface="Arial"/>
+                      <a:latin typeface="Times New Roman"/>
                       <a:ea typeface="Times New Roman"/>
                       <a:cs typeface="Times New Roman"/>
                     </a:rPr>
@@ -2421,7 +2429,7 @@
                       <a:solidFill>
                         <a:srgbClr val="222222"/>
                       </a:solidFill>
-                      <a:latin typeface="Arial"/>
+                      <a:latin typeface="Times New Roman"/>
                       <a:ea typeface="Times New Roman"/>
                       <a:cs typeface="Times New Roman"/>
                     </a:rPr>
@@ -2464,7 +2472,7 @@
                       <a:solidFill>
                         <a:srgbClr val="222222"/>
                       </a:solidFill>
-                      <a:latin typeface="Arial"/>
+                      <a:latin typeface="Times New Roman"/>
                       <a:ea typeface="Times New Roman"/>
                       <a:cs typeface="Times New Roman"/>
                     </a:rPr>
@@ -2507,7 +2515,7 @@
                       <a:solidFill>
                         <a:srgbClr val="222222"/>
                       </a:solidFill>
-                      <a:latin typeface="Arial"/>
+                      <a:latin typeface="Times New Roman"/>
                       <a:ea typeface="Times New Roman"/>
                       <a:cs typeface="Times New Roman"/>
                     </a:rPr>
@@ -2550,7 +2558,7 @@
                       <a:solidFill>
                         <a:srgbClr val="222222"/>
                       </a:solidFill>
-                      <a:latin typeface="Arial"/>
+                      <a:latin typeface="Times New Roman"/>
                       <a:ea typeface="Times New Roman"/>
                       <a:cs typeface="Times New Roman"/>
                     </a:rPr>
@@ -2809,7 +2817,7 @@
                       <a:solidFill>
                         <a:srgbClr val="222222"/>
                       </a:solidFill>
-                      <a:latin typeface="Arial"/>
+                      <a:latin typeface="Times New Roman"/>
                       <a:ea typeface="Times New Roman"/>
                       <a:cs typeface="Times New Roman"/>
                     </a:rPr>
@@ -2852,7 +2860,7 @@
                       <a:solidFill>
                         <a:srgbClr val="222222"/>
                       </a:solidFill>
-                      <a:latin typeface="Arial"/>
+                      <a:latin typeface="Times New Roman"/>
                       <a:ea typeface="Times New Roman"/>
                       <a:cs typeface="Times New Roman"/>
                     </a:rPr>
@@ -2895,7 +2903,7 @@
                       <a:solidFill>
                         <a:srgbClr val="222222"/>
                       </a:solidFill>
-                      <a:latin typeface="Arial"/>
+                      <a:latin typeface="Times New Roman"/>
                       <a:ea typeface="Times New Roman"/>
                       <a:cs typeface="Times New Roman"/>
                     </a:rPr>
@@ -2912,7 +2920,7 @@
                       <a:solidFill>
                         <a:srgbClr val="222222"/>
                       </a:solidFill>
-                      <a:latin typeface="Arial"/>
+                      <a:latin typeface="Times New Roman"/>
                       <a:ea typeface="Times New Roman"/>
                       <a:cs typeface="Times New Roman"/>
                     </a:rPr>
@@ -3055,7 +3063,7 @@
                       <a:solidFill>
                         <a:srgbClr val="222222"/>
                       </a:solidFill>
-                      <a:latin typeface="Comic Sans MS"/>
+                      <a:latin typeface="Times New Roman"/>
                       <a:ea typeface="Times New Roman"/>
                       <a:cs typeface="Times New Roman"/>
                     </a:rPr>
@@ -3098,7 +3106,7 @@
                       <a:solidFill>
                         <a:srgbClr val="222222"/>
                       </a:solidFill>
-                      <a:latin typeface="Comic Sans MS"/>
+                      <a:latin typeface="Times New Roman"/>
                       <a:ea typeface="Times New Roman"/>
                       <a:cs typeface="Times New Roman"/>
                     </a:rPr>
@@ -3141,7 +3149,7 @@
                       <a:solidFill>
                         <a:srgbClr val="222222"/>
                       </a:solidFill>
-                      <a:latin typeface="Arial"/>
+                      <a:latin typeface="Times New Roman"/>
                       <a:ea typeface="Times New Roman"/>
                       <a:cs typeface="Times New Roman"/>
                     </a:rPr>
@@ -3184,7 +3192,7 @@
                       <a:solidFill>
                         <a:srgbClr val="222222"/>
                       </a:solidFill>
-                      <a:latin typeface="Arial"/>
+                      <a:latin typeface="Times New Roman"/>
                       <a:ea typeface="Times New Roman"/>
                       <a:cs typeface="Times New Roman"/>
                     </a:rPr>
@@ -3227,7 +3235,7 @@
                       <a:solidFill>
                         <a:srgbClr val="222222"/>
                       </a:solidFill>
-                      <a:latin typeface="Arial"/>
+                      <a:latin typeface="Times New Roman"/>
                       <a:ea typeface="Times New Roman"/>
                       <a:cs typeface="Times New Roman"/>
                     </a:rPr>
@@ -3971,7 +3979,7 @@
                       <a:solidFill>
                         <a:srgbClr val="222222"/>
                       </a:solidFill>
-                      <a:latin typeface="Comic Sans MS"/>
+                      <a:latin typeface="Times New Roman"/>
                       <a:ea typeface="Times New Roman"/>
                       <a:cs typeface="Times New Roman"/>
                     </a:rPr>
@@ -4014,7 +4022,7 @@
                       <a:solidFill>
                         <a:srgbClr val="222222"/>
                       </a:solidFill>
-                      <a:latin typeface="Arial"/>
+                      <a:latin typeface="Times New Roman"/>
                       <a:ea typeface="Times New Roman"/>
                       <a:cs typeface="Times New Roman"/>
                     </a:rPr>
@@ -4057,7 +4065,7 @@
                       <a:solidFill>
                         <a:srgbClr val="222222"/>
                       </a:solidFill>
-                      <a:latin typeface="Arial"/>
+                      <a:latin typeface="Times New Roman"/>
                       <a:ea typeface="Times New Roman"/>
                       <a:cs typeface="Times New Roman"/>
                     </a:rPr>
@@ -4100,7 +4108,7 @@
                       <a:solidFill>
                         <a:srgbClr val="222222"/>
                       </a:solidFill>
-                      <a:latin typeface="Arial"/>
+                      <a:latin typeface="Times New Roman"/>
                       <a:ea typeface="Times New Roman"/>
                       <a:cs typeface="Times New Roman"/>
                     </a:rPr>
@@ -4143,7 +4151,7 @@
                       <a:solidFill>
                         <a:srgbClr val="222222"/>
                       </a:solidFill>
-                      <a:latin typeface="Arial"/>
+                      <a:latin typeface="Times New Roman"/>
                       <a:ea typeface="Times New Roman"/>
                       <a:cs typeface="Times New Roman"/>
                     </a:rPr>

--- a/artifacts/editorial_accent_20261022/pptx/Figure12_Accent.pptx
+++ b/artifacts/editorial_accent_20261022/pptx/Figure12_Accent.pptx
@@ -52,14 +52,6 @@
 <file path=ppt/slides/slide1.xml><?xml version="1.0" encoding="utf-8"?>
 <p:sld xmlns:a="http://schemas.openxmlformats.org/drawingml/2006/main" xmlns:r="http://schemas.openxmlformats.org/officeDocument/2006/relationships" xmlns:p="http://schemas.openxmlformats.org/presentationml/2006/main">
   <p:cSld>
-    <p:bg>
-      <p:bgPr>
-        <a:solidFill>
-          <a:srgbClr val="FFFFFF"/>
-        </a:solidFill>
-        <a:effectLst/>
-      </p:bgPr>
-    </p:bg>
     <p:spTree>
       <p:nvGrpSpPr>
         <p:cNvPr id="1" name=""/>
@@ -296,7 +288,7 @@
                       <a:solidFill>
                         <a:srgbClr val="222222"/>
                       </a:solidFill>
-                      <a:latin typeface="Times New Roman"/>
+                      <a:latin typeface="Comic Sans MS"/>
                       <a:ea typeface="Times New Roman"/>
                       <a:cs typeface="Times New Roman"/>
                     </a:rPr>
@@ -549,7 +541,7 @@
                       <a:solidFill>
                         <a:srgbClr val="222222"/>
                       </a:solidFill>
-                      <a:latin typeface="Times New Roman"/>
+                      <a:latin typeface="Comic Sans MS"/>
                       <a:ea typeface="Times New Roman"/>
                       <a:cs typeface="Times New Roman"/>
                     </a:rPr>
@@ -592,7 +584,7 @@
                       <a:solidFill>
                         <a:srgbClr val="222222"/>
                       </a:solidFill>
-                      <a:latin typeface="Times New Roman"/>
+                      <a:latin typeface="Arial"/>
                       <a:ea typeface="Times New Roman"/>
                       <a:cs typeface="Times New Roman"/>
                     </a:rPr>
@@ -635,7 +627,7 @@
                       <a:solidFill>
                         <a:srgbClr val="222222"/>
                       </a:solidFill>
-                      <a:latin typeface="Times New Roman"/>
+                      <a:latin typeface="Arial"/>
                       <a:ea typeface="Times New Roman"/>
                       <a:cs typeface="Times New Roman"/>
                     </a:rPr>
@@ -678,7 +670,7 @@
                       <a:solidFill>
                         <a:srgbClr val="222222"/>
                       </a:solidFill>
-                      <a:latin typeface="Times New Roman"/>
+                      <a:latin typeface="Arial"/>
                       <a:ea typeface="Times New Roman"/>
                       <a:cs typeface="Times New Roman"/>
                     </a:rPr>
@@ -721,7 +713,7 @@
                       <a:solidFill>
                         <a:srgbClr val="222222"/>
                       </a:solidFill>
-                      <a:latin typeface="Times New Roman"/>
+                      <a:latin typeface="Arial"/>
                       <a:ea typeface="Times New Roman"/>
                       <a:cs typeface="Times New Roman"/>
                     </a:rPr>
@@ -764,7 +756,7 @@
                       <a:solidFill>
                         <a:srgbClr val="222222"/>
                       </a:solidFill>
-                      <a:latin typeface="Times New Roman"/>
+                      <a:latin typeface="Arial"/>
                       <a:ea typeface="Times New Roman"/>
                       <a:cs typeface="Times New Roman"/>
                     </a:rPr>
@@ -807,7 +799,7 @@
                       <a:solidFill>
                         <a:srgbClr val="222222"/>
                       </a:solidFill>
-                      <a:latin typeface="Times New Roman"/>
+                      <a:latin typeface="Arial"/>
                       <a:ea typeface="Times New Roman"/>
                       <a:cs typeface="Times New Roman"/>
                     </a:rPr>
@@ -936,7 +928,7 @@
                       <a:solidFill>
                         <a:srgbClr val="222222"/>
                       </a:solidFill>
-                      <a:latin typeface="Times New Roman"/>
+                      <a:latin typeface="Comic Sans MS"/>
                       <a:ea typeface="Times New Roman"/>
                       <a:cs typeface="Times New Roman"/>
                     </a:rPr>
@@ -979,7 +971,7 @@
                       <a:solidFill>
                         <a:srgbClr val="222222"/>
                       </a:solidFill>
-                      <a:latin typeface="Times New Roman"/>
+                      <a:latin typeface="Arial"/>
                       <a:ea typeface="Times New Roman"/>
                       <a:cs typeface="Times New Roman"/>
                     </a:rPr>
@@ -1022,7 +1014,7 @@
                       <a:solidFill>
                         <a:srgbClr val="222222"/>
                       </a:solidFill>
-                      <a:latin typeface="Times New Roman"/>
+                      <a:latin typeface="Arial"/>
                       <a:ea typeface="Times New Roman"/>
                       <a:cs typeface="Times New Roman"/>
                     </a:rPr>
@@ -1065,7 +1057,7 @@
                       <a:solidFill>
                         <a:srgbClr val="222222"/>
                       </a:solidFill>
-                      <a:latin typeface="Times New Roman"/>
+                      <a:latin typeface="Arial"/>
                       <a:ea typeface="Times New Roman"/>
                       <a:cs typeface="Times New Roman"/>
                     </a:rPr>
@@ -1108,7 +1100,7 @@
                       <a:solidFill>
                         <a:srgbClr val="222222"/>
                       </a:solidFill>
-                      <a:latin typeface="Times New Roman"/>
+                      <a:latin typeface="Arial"/>
                       <a:ea typeface="Times New Roman"/>
                       <a:cs typeface="Times New Roman"/>
                     </a:rPr>
@@ -1151,7 +1143,7 @@
                       <a:solidFill>
                         <a:srgbClr val="222222"/>
                       </a:solidFill>
-                      <a:latin typeface="Times New Roman"/>
+                      <a:latin typeface="Arial"/>
                       <a:ea typeface="Times New Roman"/>
                       <a:cs typeface="Times New Roman"/>
                     </a:rPr>
@@ -1194,7 +1186,7 @@
                       <a:solidFill>
                         <a:srgbClr val="222222"/>
                       </a:solidFill>
-                      <a:latin typeface="Times New Roman"/>
+                      <a:latin typeface="Arial"/>
                       <a:ea typeface="Times New Roman"/>
                       <a:cs typeface="Times New Roman"/>
                     </a:rPr>
@@ -2257,7 +2249,7 @@
                       <a:solidFill>
                         <a:srgbClr val="222222"/>
                       </a:solidFill>
-                      <a:latin typeface="Times New Roman"/>
+                      <a:latin typeface="Comic Sans MS"/>
                       <a:ea typeface="Times New Roman"/>
                       <a:cs typeface="Times New Roman"/>
                     </a:rPr>
@@ -2300,7 +2292,7 @@
                       <a:solidFill>
                         <a:srgbClr val="222222"/>
                       </a:solidFill>
-                      <a:latin typeface="Times New Roman"/>
+                      <a:latin typeface="Arial"/>
                       <a:ea typeface="Times New Roman"/>
                       <a:cs typeface="Times New Roman"/>
                     </a:rPr>
@@ -2343,7 +2335,7 @@
                       <a:solidFill>
                         <a:srgbClr val="222222"/>
                       </a:solidFill>
-                      <a:latin typeface="Times New Roman"/>
+                      <a:latin typeface="Arial"/>
                       <a:ea typeface="Times New Roman"/>
                       <a:cs typeface="Times New Roman"/>
                     </a:rPr>
@@ -2386,7 +2378,7 @@
                       <a:solidFill>
                         <a:srgbClr val="222222"/>
                       </a:solidFill>
-                      <a:latin typeface="Times New Roman"/>
+                      <a:latin typeface="Arial"/>
                       <a:ea typeface="Times New Roman"/>
                       <a:cs typeface="Times New Roman"/>
                     </a:rPr>
@@ -2429,7 +2421,7 @@
                       <a:solidFill>
                         <a:srgbClr val="222222"/>
                       </a:solidFill>
-                      <a:latin typeface="Times New Roman"/>
+                      <a:latin typeface="Arial"/>
                       <a:ea typeface="Times New Roman"/>
                       <a:cs typeface="Times New Roman"/>
                     </a:rPr>
@@ -2472,7 +2464,7 @@
                       <a:solidFill>
                         <a:srgbClr val="222222"/>
                       </a:solidFill>
-                      <a:latin typeface="Times New Roman"/>
+                      <a:latin typeface="Arial"/>
                       <a:ea typeface="Times New Roman"/>
                       <a:cs typeface="Times New Roman"/>
                     </a:rPr>
@@ -2515,7 +2507,7 @@
                       <a:solidFill>
                         <a:srgbClr val="222222"/>
                       </a:solidFill>
-                      <a:latin typeface="Times New Roman"/>
+                      <a:latin typeface="Arial"/>
                       <a:ea typeface="Times New Roman"/>
                       <a:cs typeface="Times New Roman"/>
                     </a:rPr>
@@ -2558,7 +2550,7 @@
                       <a:solidFill>
                         <a:srgbClr val="222222"/>
                       </a:solidFill>
-                      <a:latin typeface="Times New Roman"/>
+                      <a:latin typeface="Arial"/>
                       <a:ea typeface="Times New Roman"/>
                       <a:cs typeface="Times New Roman"/>
                     </a:rPr>
@@ -2817,7 +2809,7 @@
                       <a:solidFill>
                         <a:srgbClr val="222222"/>
                       </a:solidFill>
-                      <a:latin typeface="Times New Roman"/>
+                      <a:latin typeface="Arial"/>
                       <a:ea typeface="Times New Roman"/>
                       <a:cs typeface="Times New Roman"/>
                     </a:rPr>
@@ -2860,7 +2852,7 @@
                       <a:solidFill>
                         <a:srgbClr val="222222"/>
                       </a:solidFill>
-                      <a:latin typeface="Times New Roman"/>
+                      <a:latin typeface="Arial"/>
                       <a:ea typeface="Times New Roman"/>
                       <a:cs typeface="Times New Roman"/>
                     </a:rPr>
@@ -2903,7 +2895,7 @@
                       <a:solidFill>
                         <a:srgbClr val="222222"/>
                       </a:solidFill>
-                      <a:latin typeface="Times New Roman"/>
+                      <a:latin typeface="Arial"/>
                       <a:ea typeface="Times New Roman"/>
                       <a:cs typeface="Times New Roman"/>
                     </a:rPr>
@@ -2920,7 +2912,7 @@
                       <a:solidFill>
                         <a:srgbClr val="222222"/>
                       </a:solidFill>
-                      <a:latin typeface="Times New Roman"/>
+                      <a:latin typeface="Arial"/>
                       <a:ea typeface="Times New Roman"/>
                       <a:cs typeface="Times New Roman"/>
                     </a:rPr>
@@ -3063,7 +3055,7 @@
                       <a:solidFill>
                         <a:srgbClr val="222222"/>
                       </a:solidFill>
-                      <a:latin typeface="Times New Roman"/>
+                      <a:latin typeface="Comic Sans MS"/>
                       <a:ea typeface="Times New Roman"/>
                       <a:cs typeface="Times New Roman"/>
                     </a:rPr>
@@ -3106,7 +3098,7 @@
                       <a:solidFill>
                         <a:srgbClr val="222222"/>
                       </a:solidFill>
-                      <a:latin typeface="Times New Roman"/>
+                      <a:latin typeface="Comic Sans MS"/>
                       <a:ea typeface="Times New Roman"/>
                       <a:cs typeface="Times New Roman"/>
                     </a:rPr>
@@ -3149,7 +3141,7 @@
                       <a:solidFill>
                         <a:srgbClr val="222222"/>
                       </a:solidFill>
-                      <a:latin typeface="Times New Roman"/>
+                      <a:latin typeface="Arial"/>
                       <a:ea typeface="Times New Roman"/>
                       <a:cs typeface="Times New Roman"/>
                     </a:rPr>
@@ -3192,7 +3184,7 @@
                       <a:solidFill>
                         <a:srgbClr val="222222"/>
                       </a:solidFill>
-                      <a:latin typeface="Times New Roman"/>
+                      <a:latin typeface="Arial"/>
                       <a:ea typeface="Times New Roman"/>
                       <a:cs typeface="Times New Roman"/>
                     </a:rPr>
@@ -3235,7 +3227,7 @@
                       <a:solidFill>
                         <a:srgbClr val="222222"/>
                       </a:solidFill>
-                      <a:latin typeface="Times New Roman"/>
+                      <a:latin typeface="Arial"/>
                       <a:ea typeface="Times New Roman"/>
                       <a:cs typeface="Times New Roman"/>
                     </a:rPr>
@@ -3979,7 +3971,7 @@
                       <a:solidFill>
                         <a:srgbClr val="222222"/>
                       </a:solidFill>
-                      <a:latin typeface="Times New Roman"/>
+                      <a:latin typeface="Comic Sans MS"/>
                       <a:ea typeface="Times New Roman"/>
                       <a:cs typeface="Times New Roman"/>
                     </a:rPr>
@@ -4022,7 +4014,7 @@
                       <a:solidFill>
                         <a:srgbClr val="222222"/>
                       </a:solidFill>
-                      <a:latin typeface="Times New Roman"/>
+                      <a:latin typeface="Arial"/>
                       <a:ea typeface="Times New Roman"/>
                       <a:cs typeface="Times New Roman"/>
                     </a:rPr>
@@ -4065,7 +4057,7 @@
                       <a:solidFill>
                         <a:srgbClr val="222222"/>
                       </a:solidFill>
-                      <a:latin typeface="Times New Roman"/>
+                      <a:latin typeface="Arial"/>
                       <a:ea typeface="Times New Roman"/>
                       <a:cs typeface="Times New Roman"/>
                     </a:rPr>
@@ -4108,7 +4100,7 @@
                       <a:solidFill>
                         <a:srgbClr val="222222"/>
                       </a:solidFill>
-                      <a:latin typeface="Times New Roman"/>
+                      <a:latin typeface="Arial"/>
                       <a:ea typeface="Times New Roman"/>
                       <a:cs typeface="Times New Roman"/>
                     </a:rPr>
@@ -4151,7 +4143,7 @@
                       <a:solidFill>
                         <a:srgbClr val="222222"/>
                       </a:solidFill>
-                      <a:latin typeface="Times New Roman"/>
+                      <a:latin typeface="Arial"/>
                       <a:ea typeface="Times New Roman"/>
                       <a:cs typeface="Times New Roman"/>
                     </a:rPr>
